--- a/output/figure4_editable/20261013-161131-Figure4_architecture_selection/final/Figure4_architecture_selection_authority_v2.pptx
+++ b/output/figure4_editable/20261013-161131-Figure4_architecture_selection/final/Figure4_architecture_selection_authority_v2.pptx
@@ -745,7 +745,7 @@
         </p:nvSpPr>
         <p:spPr>
           <a:xfrm>
-            <a:off x="685800" y="600075"/>
+            <a:off x="685800" y="588962"/>
             <a:ext cx="5362575" cy="1028700"/>
           </a:xfrm>
           <a:prstGeom prst="rect">
@@ -1117,6 +1117,13 @@
             <a:tailEnd type="triangle" w="sm" len="sm"/>
           </a:ln>
         </p:spPr>
+        <p:txBody>
+          <a:bodyPr/>
+          <a:lstStyle/>
+          <a:p>
+            <a:endParaRPr lang="en-US"/>
+          </a:p>
+        </p:txBody>
       </p:sp>
       <p:sp>
         <p:nvSpPr>
@@ -1148,6 +1155,13 @@
             <a:tailEnd type="triangle" w="sm" len="sm"/>
           </a:ln>
         </p:spPr>
+        <p:txBody>
+          <a:bodyPr/>
+          <a:lstStyle/>
+          <a:p>
+            <a:endParaRPr lang="en-US"/>
+          </a:p>
+        </p:txBody>
       </p:sp>
       <p:sp>
         <p:nvSpPr>
@@ -1179,6 +1193,13 @@
             <a:tailEnd type="triangle" w="sm" len="sm"/>
           </a:ln>
         </p:spPr>
+        <p:txBody>
+          <a:bodyPr/>
+          <a:lstStyle/>
+          <a:p>
+            <a:endParaRPr lang="en-US"/>
+          </a:p>
+        </p:txBody>
       </p:sp>
       <p:sp>
         <p:nvSpPr>
@@ -1210,6 +1231,13 @@
             <a:tailEnd type="triangle" w="sm" len="sm"/>
           </a:ln>
         </p:spPr>
+        <p:txBody>
+          <a:bodyPr/>
+          <a:lstStyle/>
+          <a:p>
+            <a:endParaRPr lang="en-US"/>
+          </a:p>
+        </p:txBody>
       </p:sp>
       <p:sp>
         <p:nvSpPr>
@@ -1241,6 +1269,13 @@
             <a:tailEnd type="triangle" w="sm" len="sm"/>
           </a:ln>
         </p:spPr>
+        <p:txBody>
+          <a:bodyPr/>
+          <a:lstStyle/>
+          <a:p>
+            <a:endParaRPr lang="en-US"/>
+          </a:p>
+        </p:txBody>
       </p:sp>
       <p:sp>
         <p:nvSpPr>
@@ -1383,6 +1418,13 @@
             <a:tailEnd type="triangle" w="sm" len="sm"/>
           </a:ln>
         </p:spPr>
+        <p:txBody>
+          <a:bodyPr/>
+          <a:lstStyle/>
+          <a:p>
+            <a:endParaRPr lang="en-US"/>
+          </a:p>
+        </p:txBody>
       </p:sp>
       <p:sp>
         <p:nvSpPr>
@@ -1414,6 +1456,13 @@
             <a:tailEnd type="triangle" w="sm" len="sm"/>
           </a:ln>
         </p:spPr>
+        <p:txBody>
+          <a:bodyPr/>
+          <a:lstStyle/>
+          <a:p>
+            <a:endParaRPr lang="en-US"/>
+          </a:p>
+        </p:txBody>
       </p:sp>
       <p:sp>
         <p:nvSpPr>
@@ -1445,6 +1494,13 @@
             <a:tailEnd type="triangle" w="sm" len="sm"/>
           </a:ln>
         </p:spPr>
+        <p:txBody>
+          <a:bodyPr/>
+          <a:lstStyle/>
+          <a:p>
+            <a:endParaRPr lang="en-US"/>
+          </a:p>
+        </p:txBody>
       </p:sp>
       <p:cxnSp>
         <p:nvCxnSpPr>
@@ -3291,7 +3347,7 @@
               <a:buNone/>
             </a:pPr>
             <a:r>
-              <a:rPr sz="620" dirty="0">
+              <a:rPr sz="800" dirty="0">
                 <a:solidFill>
                   <a:srgbClr val="172127"/>
                 </a:solidFill>
@@ -3301,7 +3357,7 @@
               </a:rPr>
               <a:t>Input: Target QA Application Scenario</a:t>
             </a:r>
-            <a:endParaRPr sz="620" dirty="0"/>
+            <a:endParaRPr sz="800" dirty="0"/>
           </a:p>
         </p:txBody>
       </p:sp>
@@ -3342,7 +3398,7 @@
               <a:buNone/>
             </a:pPr>
             <a:r>
-              <a:rPr sz="670" dirty="0">
+              <a:rPr sz="800" dirty="0">
                 <a:solidFill>
                   <a:srgbClr val="172127"/>
                 </a:solidFill>
@@ -3352,7 +3408,7 @@
               </a:rPr>
               <a:t>(Assess Key Decision Factors)</a:t>
             </a:r>
-            <a:endParaRPr sz="670" dirty="0"/>
+            <a:endParaRPr sz="800" dirty="0"/>
           </a:p>
         </p:txBody>
       </p:sp>
@@ -3393,7 +3449,7 @@
               <a:buNone/>
             </a:pPr>
             <a:r>
-              <a:rPr sz="810" b="1">
+              <a:rPr sz="810" b="1" dirty="0">
                 <a:solidFill>
                   <a:srgbClr val="172127"/>
                 </a:solidFill>
@@ -3403,7 +3459,7 @@
               </a:rPr>
               <a:t>Phase 1: Pre-screening</a:t>
             </a:r>
-            <a:endParaRPr sz="810"/>
+            <a:endParaRPr sz="810" dirty="0"/>
           </a:p>
         </p:txBody>
       </p:sp>
@@ -3444,7 +3500,7 @@
               <a:buNone/>
             </a:pPr>
             <a:r>
-              <a:rPr sz="480" dirty="0">
+              <a:rPr sz="700" dirty="0">
                 <a:solidFill>
                   <a:srgbClr val="172127"/>
                 </a:solidFill>
@@ -3454,14 +3510,14 @@
               </a:rPr>
               <a:t>Is task complexity low and</a:t>
             </a:r>
-            <a:endParaRPr sz="480" dirty="0"/>
+            <a:endParaRPr sz="700" dirty="0"/>
           </a:p>
           <a:p>
             <a:pPr algn="ctr">
               <a:buNone/>
             </a:pPr>
             <a:r>
-              <a:rPr sz="480" dirty="0">
+              <a:rPr sz="700" dirty="0">
                 <a:solidFill>
                   <a:srgbClr val="172127"/>
                 </a:solidFill>
@@ -3471,14 +3527,14 @@
               </a:rPr>
               <a:t>specialization requirement not</a:t>
             </a:r>
-            <a:endParaRPr sz="480" dirty="0"/>
+            <a:endParaRPr sz="700" dirty="0"/>
           </a:p>
           <a:p>
             <a:pPr algn="ctr">
               <a:buNone/>
             </a:pPr>
             <a:r>
-              <a:rPr sz="480" dirty="0">
+              <a:rPr sz="700" dirty="0">
                 <a:solidFill>
                   <a:srgbClr val="172127"/>
                 </a:solidFill>
@@ -3488,7 +3544,7 @@
               </a:rPr>
               <a:t>high?</a:t>
             </a:r>
-            <a:endParaRPr sz="480" dirty="0"/>
+            <a:endParaRPr sz="700" dirty="0"/>
           </a:p>
         </p:txBody>
       </p:sp>
@@ -3542,7 +3598,7 @@
               </a:defRPr>
             </a:pPr>
             <a:r>
-              <a:rPr sz="480" b="0" dirty="0">
+              <a:rPr sz="700" b="0" dirty="0">
                 <a:solidFill>
                   <a:srgbClr val="172127"/>
                 </a:solidFill>
@@ -3552,7 +3608,7 @@
               </a:rPr>
               <a:t>High safety / compliance requirements,</a:t>
             </a:r>
-            <a:endParaRPr sz="480" dirty="0"/>
+            <a:endParaRPr sz="700" dirty="0"/>
           </a:p>
           <a:p>
             <a:pPr algn="ctr">
@@ -3564,7 +3620,7 @@
               </a:defRPr>
             </a:pPr>
             <a:r>
-              <a:rPr sz="480" b="0" dirty="0">
+              <a:rPr sz="700" b="0" dirty="0">
                 <a:solidFill>
                   <a:srgbClr val="172127"/>
                 </a:solidFill>
@@ -3574,7 +3630,7 @@
               </a:rPr>
               <a:t>such as Medical or Legal use?</a:t>
             </a:r>
-            <a:endParaRPr sz="480" dirty="0"/>
+            <a:endParaRPr sz="700" dirty="0"/>
           </a:p>
         </p:txBody>
       </p:sp>
@@ -3798,7 +3854,7 @@
         </p:nvSpPr>
         <p:spPr>
           <a:xfrm>
-            <a:off x="3962400" y="733425"/>
+            <a:off x="3962400" y="720344"/>
             <a:ext cx="1704975" cy="114300"/>
           </a:xfrm>
           <a:prstGeom prst="rect">
@@ -3819,7 +3875,7 @@
               <a:buNone/>
             </a:pPr>
             <a:r>
-              <a:rPr sz="540" b="1">
+              <a:rPr sz="700" b="1" dirty="0">
                 <a:solidFill>
                   <a:srgbClr val="172127"/>
                 </a:solidFill>
@@ -3830,7 +3886,7 @@
               <a:t>Single-Agent </a:t>
             </a:r>
             <a:r>
-              <a:rPr sz="540">
+              <a:rPr sz="700" dirty="0">
                 <a:solidFill>
                   <a:srgbClr val="172127"/>
                 </a:solidFill>
@@ -3840,7 +3896,7 @@
               </a:rPr>
               <a:t>Low latency, low cost.</a:t>
             </a:r>
-            <a:endParaRPr sz="540"/>
+            <a:endParaRPr sz="700" dirty="0"/>
           </a:p>
         </p:txBody>
       </p:sp>
@@ -3881,7 +3937,7 @@
               <a:buNone/>
             </a:pPr>
             <a:r>
-              <a:rPr sz="450">
+              <a:rPr sz="700" dirty="0">
                 <a:solidFill>
                   <a:srgbClr val="172127"/>
                 </a:solidFill>
@@ -3891,14 +3947,14 @@
               </a:rPr>
               <a:t>Suitable for: Simple fact query,</a:t>
             </a:r>
-            <a:endParaRPr sz="450"/>
+            <a:endParaRPr sz="700" dirty="0"/>
           </a:p>
           <a:p>
             <a:pPr algn="l">
               <a:buNone/>
             </a:pPr>
             <a:r>
-              <a:rPr sz="450">
+              <a:rPr sz="700" dirty="0">
                 <a:solidFill>
                   <a:srgbClr val="172127"/>
                 </a:solidFill>
@@ -3908,7 +3964,7 @@
               </a:rPr>
               <a:t>single-step reasoning tasks</a:t>
             </a:r>
-            <a:endParaRPr sz="450"/>
+            <a:endParaRPr sz="700" dirty="0"/>
           </a:p>
         </p:txBody>
       </p:sp>
@@ -3962,7 +4018,7 @@
               </a:defRPr>
             </a:pPr>
             <a:r>
-              <a:rPr sz="540" b="1" dirty="0">
+              <a:rPr sz="700" b="1" dirty="0">
                 <a:solidFill>
                   <a:srgbClr val="172127"/>
                 </a:solidFill>
@@ -3972,7 +4028,7 @@
               </a:rPr>
               <a:t>HITL / Governance review</a:t>
             </a:r>
-            <a:endParaRPr sz="540" dirty="0"/>
+            <a:endParaRPr sz="700" dirty="0"/>
           </a:p>
         </p:txBody>
       </p:sp>
@@ -4026,7 +4082,7 @@
               </a:defRPr>
             </a:pPr>
             <a:r>
-              <a:rPr sz="450" b="0" dirty="0">
+              <a:rPr sz="700" b="0" dirty="0">
                 <a:solidFill>
                   <a:srgbClr val="172127"/>
                 </a:solidFill>
@@ -4036,7 +4092,7 @@
               </a:rPr>
               <a:t>Add review requirements; then continue</a:t>
             </a:r>
-            <a:endParaRPr sz="450" dirty="0"/>
+            <a:endParaRPr sz="700" dirty="0"/>
           </a:p>
           <a:p>
             <a:pPr algn="l">
@@ -4048,7 +4104,7 @@
               </a:defRPr>
             </a:pPr>
             <a:r>
-              <a:rPr sz="450" b="0" dirty="0">
+              <a:rPr sz="700" b="0" dirty="0">
                 <a:solidFill>
                   <a:srgbClr val="172127"/>
                 </a:solidFill>
@@ -4058,7 +4114,7 @@
               </a:rPr>
               <a:t>to Phase 2 for architecture selection.</a:t>
             </a:r>
-            <a:endParaRPr sz="450" dirty="0"/>
+            <a:endParaRPr sz="700" dirty="0"/>
           </a:p>
         </p:txBody>
       </p:sp>
@@ -4163,7 +4219,7 @@
               </a:defRPr>
             </a:pPr>
             <a:r>
-              <a:rPr sz="480" b="0" dirty="0">
+              <a:rPr sz="700" b="0" dirty="0">
                 <a:solidFill>
                   <a:srgbClr val="172127"/>
                 </a:solidFill>
@@ -4173,7 +4229,7 @@
               </a:rPr>
               <a:t>Does decision authority remain fixed</a:t>
             </a:r>
-            <a:endParaRPr sz="480" dirty="0"/>
+            <a:endParaRPr sz="700" dirty="0"/>
           </a:p>
           <a:p>
             <a:pPr algn="ctr">
@@ -4185,7 +4241,7 @@
               </a:defRPr>
             </a:pPr>
             <a:r>
-              <a:rPr sz="480" b="0" dirty="0">
+              <a:rPr sz="700" b="0" dirty="0">
                 <a:solidFill>
                   <a:srgbClr val="172127"/>
                 </a:solidFill>
@@ -4195,7 +4251,7 @@
               </a:rPr>
               <a:t>with a controller or asymmetric stages?</a:t>
             </a:r>
-            <a:endParaRPr sz="480" dirty="0"/>
+            <a:endParaRPr sz="700" dirty="0"/>
           </a:p>
         </p:txBody>
       </p:sp>
@@ -4249,7 +4305,7 @@
               </a:defRPr>
             </a:pPr>
             <a:r>
-              <a:rPr sz="480" b="0">
+              <a:rPr sz="700" b="0" dirty="0">
                 <a:solidFill>
                   <a:srgbClr val="172127"/>
                 </a:solidFill>
@@ -4259,7 +4315,7 @@
               </a:rPr>
               <a:t>Must decision authority change</a:t>
             </a:r>
-            <a:endParaRPr sz="480"/>
+            <a:endParaRPr sz="700" dirty="0"/>
           </a:p>
           <a:p>
             <a:pPr algn="ctr">
@@ -4271,7 +4327,7 @@
               </a:defRPr>
             </a:pPr>
             <a:r>
-              <a:rPr sz="480" b="0">
+              <a:rPr sz="700" b="0" dirty="0">
                 <a:solidFill>
                   <a:srgbClr val="172127"/>
                 </a:solidFill>
@@ -4281,7 +4337,7 @@
               </a:rPr>
               <a:t>across stages or states?</a:t>
             </a:r>
-            <a:endParaRPr sz="480"/>
+            <a:endParaRPr sz="700" dirty="0"/>
           </a:p>
         </p:txBody>
       </p:sp>
@@ -4538,7 +4594,7 @@
               </a:defRPr>
             </a:pPr>
             <a:r>
-              <a:rPr sz="540" b="1">
+              <a:rPr sz="700" b="1" dirty="0">
                 <a:latin typeface="Arial Narrow"/>
                 <a:ea typeface="Arial Narrow"/>
                 <a:cs typeface="Arial Narrow"/>
@@ -4546,7 +4602,7 @@
               <a:t>Hierarchical  </a:t>
             </a:r>
             <a:r>
-              <a:rPr sz="540" b="0">
+              <a:rPr sz="700" b="0" dirty="0">
                 <a:latin typeface="Arial Narrow"/>
                 <a:ea typeface="Arial Narrow"/>
                 <a:cs typeface="Arial Narrow"/>
@@ -4593,7 +4649,7 @@
               <a:buNone/>
             </a:pPr>
             <a:r>
-              <a:rPr sz="450">
+              <a:rPr sz="700" dirty="0">
                 <a:solidFill>
                   <a:srgbClr val="172127"/>
                 </a:solidFill>
@@ -4603,14 +4659,14 @@
               </a:rPr>
               <a:t>Suitable for: Knowledge-intensive QA,</a:t>
             </a:r>
-            <a:endParaRPr sz="450"/>
+            <a:endParaRPr sz="700" dirty="0"/>
           </a:p>
           <a:p>
             <a:pPr algn="l">
               <a:buNone/>
             </a:pPr>
             <a:r>
-              <a:rPr sz="450">
+              <a:rPr sz="700" dirty="0">
                 <a:solidFill>
                   <a:srgbClr val="172127"/>
                 </a:solidFill>
@@ -4620,7 +4676,7 @@
               </a:rPr>
               <a:t>long document QA</a:t>
             </a:r>
-            <a:endParaRPr sz="450"/>
+            <a:endParaRPr sz="700" dirty="0"/>
           </a:p>
         </p:txBody>
       </p:sp>
@@ -4673,7 +4729,7 @@
               </a:defRPr>
             </a:pPr>
             <a:r>
-              <a:rPr sz="540" b="1">
+              <a:rPr sz="700" b="1" dirty="0">
                 <a:latin typeface="Arial Narrow"/>
                 <a:ea typeface="Arial Narrow"/>
                 <a:cs typeface="Arial Narrow"/>
@@ -4681,7 +4737,7 @@
               <a:t>Hybrid  </a:t>
             </a:r>
             <a:r>
-              <a:rPr sz="540" b="0">
+              <a:rPr sz="700" b="0" dirty="0">
                 <a:latin typeface="Arial Narrow"/>
                 <a:ea typeface="Arial Narrow"/>
                 <a:cs typeface="Arial Narrow"/>
@@ -4741,7 +4797,7 @@
               </a:defRPr>
             </a:pPr>
             <a:r>
-              <a:rPr sz="450" b="0">
+              <a:rPr sz="700" b="0" dirty="0">
                 <a:solidFill>
                   <a:srgbClr val="172127"/>
                 </a:solidFill>
@@ -4751,7 +4807,7 @@
               </a:rPr>
               <a:t>Peer and asymmetric control switch</a:t>
             </a:r>
-            <a:endParaRPr sz="450"/>
+            <a:endParaRPr sz="700" dirty="0"/>
           </a:p>
           <a:p>
             <a:pPr algn="l">
@@ -4763,7 +4819,7 @@
               </a:defRPr>
             </a:pPr>
             <a:r>
-              <a:rPr sz="450" b="0">
+              <a:rPr sz="700" b="0" dirty="0">
                 <a:solidFill>
                   <a:srgbClr val="172127"/>
                 </a:solidFill>
@@ -4773,7 +4829,7 @@
               </a:rPr>
               <a:t>with task stages or decision states.</a:t>
             </a:r>
-            <a:endParaRPr sz="450"/>
+            <a:endParaRPr sz="700" dirty="0"/>
           </a:p>
         </p:txBody>
       </p:sp>
@@ -4826,7 +4882,7 @@
               </a:defRPr>
             </a:pPr>
             <a:r>
-              <a:rPr sz="540" b="1">
+              <a:rPr sz="700" b="1" dirty="0">
                 <a:latin typeface="Arial Narrow"/>
                 <a:ea typeface="Arial Narrow"/>
                 <a:cs typeface="Arial Narrow"/>
@@ -4834,7 +4890,7 @@
               <a:t>Flat  </a:t>
             </a:r>
             <a:r>
-              <a:rPr sz="540" b="0">
+              <a:rPr sz="700" b="0" dirty="0">
                 <a:latin typeface="Arial Narrow"/>
                 <a:ea typeface="Arial Narrow"/>
                 <a:cs typeface="Arial Narrow"/>
@@ -4894,7 +4950,7 @@
               </a:defRPr>
             </a:pPr>
             <a:r>
-              <a:rPr sz="450" b="0">
+              <a:rPr sz="700" b="0" dirty="0">
                 <a:solidFill>
                   <a:srgbClr val="172127"/>
                 </a:solidFill>
@@ -4904,7 +4960,7 @@
               </a:rPr>
               <a:t>No persistent top-down controller;</a:t>
             </a:r>
-            <a:endParaRPr sz="450"/>
+            <a:endParaRPr sz="700" dirty="0"/>
           </a:p>
           <a:p>
             <a:pPr algn="l">
@@ -4916,7 +4972,7 @@
               </a:defRPr>
             </a:pPr>
             <a:r>
-              <a:rPr sz="450" b="0">
+              <a:rPr sz="700" b="0" dirty="0">
                 <a:solidFill>
                   <a:srgbClr val="172127"/>
                 </a:solidFill>
@@ -4926,7 +4982,7 @@
               </a:rPr>
               <a:t>relatively equal participation.</a:t>
             </a:r>
-            <a:endParaRPr sz="450"/>
+            <a:endParaRPr sz="700" dirty="0"/>
           </a:p>
         </p:txBody>
       </p:sp>
@@ -4980,7 +5036,7 @@
               </a:defRPr>
             </a:pPr>
             <a:r>
-              <a:rPr sz="540" b="0">
+              <a:rPr sz="700" b="0" dirty="0">
                 <a:solidFill>
                   <a:srgbClr val="172127"/>
                 </a:solidFill>
@@ -4990,7 +5046,7 @@
               </a:rPr>
               <a:t>Note: Phase 1 screens collaboration needs; Phase 2 recommends control patterns, subject to task-level evaluation.</a:t>
             </a:r>
-            <a:endParaRPr sz="600"/>
+            <a:endParaRPr sz="700" dirty="0"/>
           </a:p>
           <a:p>
             <a:pPr algn="l">
@@ -5002,7 +5058,7 @@
               </a:defRPr>
             </a:pPr>
             <a:r>
-              <a:rPr sz="540" b="0">
+              <a:rPr sz="700" b="0" dirty="0">
                 <a:solidFill>
                   <a:srgbClr val="172127"/>
                 </a:solidFill>
@@ -5012,7 +5068,7 @@
               </a:rPr>
               <a:t>Governance review may also be needed for single-agent workflows.</a:t>
             </a:r>
-            <a:endParaRPr sz="600"/>
+            <a:endParaRPr sz="700" dirty="0"/>
           </a:p>
         </p:txBody>
       </p:sp>
@@ -5334,4 +5390,10 @@
   <a:objectDefaults/>
   <a:extraClrSchemeLst/>
 </a:theme>
+</file>
+
+<file path=docMetadata/LabelInfo.xml><?xml version="1.0" encoding="utf-8"?>
+<clbl:labelList xmlns:clbl="http://schemas.microsoft.com/office/2020/mipLabelMetadata">
+  <clbl:label id="{c2917835-e376-4a9b-97c4-07e18331d57c}" enabled="1" method="Standard" siteId="{4944a6fe-8b0f-447a-8e35-cec5e80a5ce0}" contentBits="0" removed="0"/>
+</clbl:labelList>
 </file>